--- a/AI03-DataScience.pptx
+++ b/AI03-DataScience.pptx
@@ -9885,8 +9885,12 @@
           <a:p>
             <a:pPr lvl="1"/>
             <a:r>
+              <a:rPr lang="fr-FR" sz="2000"/>
+              <a:t>Solution </a:t>
+            </a:r>
+            <a:r>
               <a:rPr lang="fr-FR" sz="2000" dirty="0"/>
-              <a:t>Solution tiers : n8n, make.com, …</a:t>
+              <a:t>tiers : n8n, make.com, …</a:t>
             </a:r>
           </a:p>
           <a:p>
